--- a/docs/KPI_Robustness_Final_Presentation.pptx
+++ b/docs/KPI_Robustness_Final_Presentation.pptx
@@ -554,34 +554,7 @@
           <a:bodyPr/>
           <a:lstStyle/>
           <a:p>
-            <a:r>
-              <a:rPr lang="en-US" dirty="0"/>
-              <a:t>Hi everyone. I’m Tobi. This is the final results presentation for my final project: KPI Robustness in On-Time Performance Measurement.</a:t>
-            </a:r>
-          </a:p>
-          <a:p>
-            <a:r>
-              <a:rPr lang="en-US" dirty="0"/>
-              <a:t>The question I’m asking is pretty simple: when a transit agency or analyst tells you a bus route is, say, 75 percent on time, how much does that number depend on the choices someone made to compute it?</a:t>
-            </a:r>
-          </a:p>
-          <a:p>
-            <a:r>
-              <a:rPr lang="en-US" dirty="0"/>
-              <a:t>The answer is: a lot more than I expected.</a:t>
-            </a:r>
-          </a:p>
-          <a:p>
-            <a:r>
-              <a:rPr lang="en-US" dirty="0"/>
-              <a:t>[next slide]</a:t>
-            </a:r>
-          </a:p>
-          <a:p>
-            <a:r>
-              <a:rPr lang="en-US" dirty="0"/>
-              <a:t>1</a:t>
-            </a:r>
+            <a:endParaRPr lang="en-US" dirty="0"/>
           </a:p>
         </p:txBody>
       </p:sp>
@@ -665,52 +638,7 @@
           <a:bodyPr/>
           <a:lstStyle/>
           <a:p>
-            <a:r>
-              <a:rPr lang="en-US" dirty="0"/>
-              <a:t>So what do we do about this?</a:t>
-            </a:r>
-          </a:p>
-          <a:p>
-            <a:r>
-              <a:rPr lang="en-US" dirty="0"/>
-              <a:t>The practical contribution is a minimum disclosure checklist for GTFS-RT-based OTP reports.</a:t>
-            </a:r>
-          </a:p>
-          <a:p>
-            <a:r>
-              <a:rPr lang="en-US" dirty="0"/>
-              <a:t>I would not read all eleven items here. The point is that an OTP number should come with its methodology: lateness window, early-arrival treatment, stop selection, service-date rule, trip matching, sample size, exclusions, feed interval, and GTFS version.</a:t>
-            </a:r>
-          </a:p>
-          <a:p>
-            <a:r>
-              <a:rPr lang="en-US" dirty="0"/>
-              <a:t>In the GTFS-RT performance work I reviewed, this choice was usually treated as a pipeline detail rather than highlighted as part of the reported KPI methodology.</a:t>
-            </a:r>
-          </a:p>
-          <a:p>
-            <a:r>
-              <a:rPr lang="en-US" dirty="0"/>
-              <a:t>But in my results, it was the largest source of variation.</a:t>
-            </a:r>
-          </a:p>
-          <a:p>
-            <a:r>
-              <a:rPr lang="en-US" dirty="0"/>
-              <a:t>So the practical recommendation is simple: if you publish OTP from public GTFS-RT data, disclose how stop events were reconstructed, not just what lateness window you used.</a:t>
-            </a:r>
-          </a:p>
-          <a:p>
-            <a:r>
-              <a:rPr lang="en-US" dirty="0"/>
-              <a:t>[next slide]</a:t>
-            </a:r>
-          </a:p>
-          <a:p>
-            <a:r>
-              <a:rPr lang="en-US" dirty="0"/>
-              <a:t>10</a:t>
-            </a:r>
+            <a:endParaRPr lang="en-US" dirty="0"/>
           </a:p>
         </p:txBody>
       </p:sp>
@@ -794,52 +722,7 @@
           <a:bodyPr/>
           <a:lstStyle/>
           <a:p>
-            <a:r>
-              <a:rPr lang="en-US" dirty="0"/>
-              <a:t>A few limitations.</a:t>
-            </a:r>
-          </a:p>
-          <a:p>
-            <a:r>
-              <a:rPr lang="en-US" dirty="0"/>
-              <a:t>This is two routes, one agency, and about three weeks of data. I cannot claim the exact magnitudes generalize to every transit system.</a:t>
-            </a:r>
-          </a:p>
-          <a:p>
-            <a:r>
-              <a:rPr lang="en-US" dirty="0"/>
-              <a:t>I also do not have SEPTA’s internal AVL data, so I cannot validate latest against ground truth. It is a GTFS-RT-only proxy.</a:t>
-            </a:r>
-          </a:p>
-          <a:p>
-            <a:r>
-              <a:rPr lang="en-US" dirty="0"/>
-              <a:t>And the project focuses on OTP, even though for high-frequency service, headway regularity may better represent rider experience.</a:t>
-            </a:r>
-          </a:p>
-          <a:p>
-            <a:r>
-              <a:rPr lang="en-US" dirty="0"/>
-              <a:t>Future work would be a cross-agency comparison, a GTFS-RT versus AVL ground-truth comparison, and applying the same robustness protocol to headway-based reliability.</a:t>
-            </a:r>
-          </a:p>
-          <a:p>
-            <a:r>
-              <a:rPr lang="en-US" dirty="0"/>
-              <a:t>A final extension would be a dashboard or reporting interface that lets users explore the specification curve interactively.</a:t>
-            </a:r>
-          </a:p>
-          <a:p>
-            <a:r>
-              <a:rPr lang="en-US" dirty="0"/>
-              <a:t>[next slide]</a:t>
-            </a:r>
-          </a:p>
-          <a:p>
-            <a:r>
-              <a:rPr lang="en-US" dirty="0"/>
-              <a:t>11</a:t>
-            </a:r>
+            <a:endParaRPr lang="en-US" dirty="0"/>
           </a:p>
         </p:txBody>
       </p:sp>
@@ -923,34 +806,7 @@
           <a:bodyPr/>
           <a:lstStyle/>
           <a:p>
-            <a:r>
-              <a:rPr lang="en-US" dirty="0"/>
-              <a:t>That’s the talk.</a:t>
-            </a:r>
-          </a:p>
-          <a:p>
-            <a:r>
-              <a:rPr lang="en-US" dirty="0"/>
-              <a:t>The bottom line is simple: OTP from public GTFS-RT should not be reported as a single unqualified number.</a:t>
-            </a:r>
-          </a:p>
-          <a:p>
-            <a:r>
-              <a:rPr lang="en-US" dirty="0"/>
-              <a:t>Disclose how stop events were reconstructed. Disclose how “on time” was defined. And show how sensitive the result is to reasonable alternatives.</a:t>
-            </a:r>
-          </a:p>
-          <a:p>
-            <a:r>
-              <a:rPr lang="en-US" dirty="0"/>
-              <a:t>Thank you — I’m happy to take questions.</a:t>
-            </a:r>
-          </a:p>
-          <a:p>
-            <a:r>
-              <a:rPr lang="en-US" dirty="0"/>
-              <a:t>12</a:t>
-            </a:r>
+            <a:endParaRPr lang="en-US" dirty="0"/>
           </a:p>
         </p:txBody>
       </p:sp>
@@ -1034,52 +890,7 @@
           <a:bodyPr/>
           <a:lstStyle/>
           <a:p>
-            <a:r>
-              <a:rPr lang="en-US" dirty="0"/>
-              <a:t>Here’s the setup.</a:t>
-            </a:r>
-          </a:p>
-          <a:p>
-            <a:r>
-              <a:rPr lang="en-US" dirty="0"/>
-              <a:t>Transit agencies publish on-time performance numbers all the time. SEPTA, the MTA in New York, Metra in Chicago — they all report OTP as a single clean percentage on a dashboard somewhere.</a:t>
-            </a:r>
-          </a:p>
-          <a:p>
-            <a:r>
-              <a:rPr lang="en-US" dirty="0"/>
-              <a:t>But if you’re an outside analyst — a researcher, a journalist, or someone at a watchdog group — and you want to compute OTP yourself from public real-time data, you have to make a lot of methodological choices first.</a:t>
-            </a:r>
-          </a:p>
-          <a:p>
-            <a:r>
-              <a:rPr lang="en-US" dirty="0"/>
-              <a:t>Some are obvious. What counts as on time — three minutes late? Five minutes late? Some are less obvious: how do you handle early arrivals? Which stops do you measure at?</a:t>
-            </a:r>
-          </a:p>
-          <a:p>
-            <a:r>
-              <a:rPr lang="en-US" dirty="0"/>
-              <a:t>And then there are choices that happen even earlier in the pipeline, before the OTP definition is even applied. </a:t>
-            </a:r>
-          </a:p>
-          <a:p>
-            <a:r>
-              <a:rPr lang="en-US" dirty="0"/>
-              <a:t>The result is what you see on the slide: hidden choices, upstream reconstruction decisions, and the same data producing dramatically different numbers depending on the method.</a:t>
-            </a:r>
-          </a:p>
-          <a:p>
-            <a:r>
-              <a:rPr lang="en-US" dirty="0"/>
-              <a:t>[next slide]</a:t>
-            </a:r>
-          </a:p>
-          <a:p>
-            <a:r>
-              <a:rPr lang="en-US" dirty="0"/>
-              <a:t>2</a:t>
-            </a:r>
+            <a:endParaRPr lang="en-US" dirty="0"/>
           </a:p>
         </p:txBody>
       </p:sp>
@@ -1163,70 +974,7 @@
           <a:bodyPr/>
           <a:lstStyle/>
           <a:p>
-            <a:r>
-              <a:rPr lang="en-US" dirty="0"/>
-              <a:t>This is the conceptual core of the project.</a:t>
-            </a:r>
-          </a:p>
-          <a:p>
-            <a:r>
-              <a:rPr lang="en-US" dirty="0"/>
-              <a:t>When you compute OTP from public GTFS-RT data — that’s the standard real-time transit feed format — you go through these five steps.</a:t>
-            </a:r>
-          </a:p>
-          <a:p>
-            <a:r>
-              <a:rPr lang="en-US" dirty="0"/>
-              <a:t>You archive the live feed. You match the real-time updates to the static schedule. You assign each event to a service date, which is trickier than it sounds because some bus trips cross midnight. You reconstruct the stop event. And finally, you apply the OTP definition.</a:t>
-            </a:r>
-          </a:p>
-          <a:p>
-            <a:r>
-              <a:rPr lang="en-US" dirty="0"/>
-              <a:t>The literature on OTP definitions has been around for years. Lateness windows, stop selection, how to handle early arrivals — those are the choices people usually discuss. Those mostly live in step five.</a:t>
-            </a:r>
-          </a:p>
-          <a:p>
-            <a:r>
-              <a:rPr lang="en-US" dirty="0"/>
-              <a:t>But step four gets much less attention.</a:t>
-            </a:r>
-          </a:p>
-          <a:p>
-            <a:r>
-              <a:rPr lang="en-US" dirty="0"/>
-              <a:t>Here’s why it matters. GTFS-RT is not a finished historical record. It is a stream of live predictions. As a bus approaches a stop, the feed updates the predicted arrival time over and over. So for one scheduled stop event, you may have many different predictions.</a:t>
-            </a:r>
-          </a:p>
-          <a:p>
-            <a:r>
-              <a:rPr lang="en-US" dirty="0"/>
-              <a:t>Which one represents the stop? You have to pick. That choice — the snapshot-selection rule — is the under-examined methodological choice I’m focusing on.</a:t>
-            </a:r>
-          </a:p>
-          <a:p>
-            <a:r>
-              <a:rPr lang="en-US" dirty="0"/>
-              <a:t>I compare three rules: closest, which picks the prediction closest to scheduled time; last_before, which picks the last prediction before scheduled time; and latest, which picks the chronologically last prediction available. In this study, latest is treated as the closest GTFS-RT-only proxy for what actually happened.</a:t>
-            </a:r>
-          </a:p>
-          <a:p>
-            <a:r>
-              <a:rPr lang="en-US" dirty="0"/>
-              <a:t>Hold those three names in your head. We’ll come back to them.</a:t>
-            </a:r>
-          </a:p>
-          <a:p>
-            <a:r>
-              <a:rPr lang="en-US" dirty="0"/>
-              <a:t>[next slide]</a:t>
-            </a:r>
-          </a:p>
-          <a:p>
-            <a:r>
-              <a:rPr lang="en-US" dirty="0"/>
-              <a:t>3</a:t>
-            </a:r>
+            <a:endParaRPr lang="en-US" dirty="0"/>
           </a:p>
         </p:txBody>
       </p:sp>
@@ -1310,64 +1058,7 @@
           <a:bodyPr/>
           <a:lstStyle/>
           <a:p>
-            <a:r>
-              <a:rPr lang="en-US" dirty="0"/>
-              <a:t>Quick word on the framework.</a:t>
-            </a:r>
-          </a:p>
-          <a:p>
-            <a:r>
-              <a:rPr lang="en-US" dirty="0"/>
-              <a:t>I’m building on specification-curve analysis and multiverse analysis. The basic idea is: instead of computing the metric once with one set of choices, compute it across a structured set of reasonable choices and report the distribution.</a:t>
-            </a:r>
-          </a:p>
-          <a:p>
-            <a:r>
-              <a:rPr lang="en-US" dirty="0"/>
-              <a:t>I chose six dimensions because each one represents a choice an external analyst has to make when computing OTP from the data.</a:t>
-            </a:r>
-          </a:p>
-          <a:p>
-            <a:r>
-              <a:rPr lang="en-US" dirty="0"/>
-              <a:t>First is snapshot rule. This is the GTFS-RT-specific choice. Since the feed gives repeated predictions for the same scheduled stop, I need a rule for deciding which prediction represents the stop event.</a:t>
-            </a:r>
-          </a:p>
-          <a:p>
-            <a:r>
-              <a:rPr lang="en-US" dirty="0"/>
-              <a:t>Second is lateness window. This is the classic OTP definition choice: how many minutes early or late still counts as on time? I test a strict 0 to 3 minute window, a moderate -1 to +5 window, and a wider -2 to +7 window.</a:t>
-            </a:r>
-          </a:p>
-          <a:p>
-            <a:r>
-              <a:rPr lang="en-US" dirty="0"/>
-              <a:t>Third is early treatment. Early buses are tricky because they may look “not late,” but from a rider perspective, an early bus can be worse than a late bus because you might miss it completely. So I compare counting early arrivals as failures versus ignoring them.</a:t>
-            </a:r>
-          </a:p>
-          <a:p>
-            <a:r>
-              <a:rPr lang="en-US" dirty="0"/>
-              <a:t>Fourth is stop selection. Some OTP systems measure all stops, while others focus on timepoints or terminals. That matters because endpoint performance may not represent the whole route.</a:t>
-            </a:r>
-          </a:p>
-          <a:p>
-            <a:r>
-              <a:rPr lang="en-US" dirty="0"/>
-              <a:t>Fifth is time of day. Reliability can differ between AM peak, midday, PM peak, evening, and all-day service, so I include those windows separately.</a:t>
-            </a:r>
-          </a:p>
-          <a:p>
-            <a:r>
-              <a:rPr lang="en-US" dirty="0"/>
-              <a:t>Sixth is delay basis: arrival versus departure time. In SEPTA’s static GTFS feed, those scheduled times are encoded identically at every stop, so this dimension ends up producing no variation. But I kept it because it is still a real choice in GTFS-based analysis, and the zero result tells us something about the feed.</a:t>
-            </a:r>
-          </a:p>
-          <a:p>
-            <a:r>
-              <a:rPr lang="en-US" dirty="0"/>
-              <a:t>Crossing those six dimensions gives 540 specifications per route. With two routes, that gives 1,080 total specifications.</a:t>
-            </a:r>
+            <a:endParaRPr lang="en-US" dirty="0"/>
           </a:p>
         </p:txBody>
       </p:sp>
@@ -1451,58 +1142,7 @@
           <a:bodyPr/>
           <a:lstStyle/>
           <a:p>
-            <a:r>
-              <a:rPr lang="en-US" dirty="0"/>
-              <a:t>Here’s the final finding.</a:t>
-            </a:r>
-          </a:p>
-          <a:p>
-            <a:r>
-              <a:rPr lang="en-US" dirty="0"/>
-              <a:t>The full design creates 1,080 total specifications. For the main results, I focus on the high-sample specifications — 864 total, or 432 per route.</a:t>
-            </a:r>
-          </a:p>
-          <a:p>
-            <a:r>
-              <a:rPr lang="en-US" dirty="0"/>
-              <a:t>For Route 23, OTP ranges from 20.3 percent all the way up to 99.8 percent. The median is 67 percent. That is a 79.5 percentage-point spread.</a:t>
-            </a:r>
-          </a:p>
-          <a:p>
-            <a:r>
-              <a:rPr lang="en-US" dirty="0"/>
-              <a:t>Route 47 shows almost the same pattern: 20.3 percent at the low end, 99.3 percent at the high end, with a median of 60 percent.</a:t>
-            </a:r>
-          </a:p>
-          <a:p>
-            <a:r>
-              <a:rPr lang="en-US" dirty="0"/>
-              <a:t>So the same underlying data — the same routes, same agency, same time period — can produce values from about 20 percent on time to almost 100 percent on time.</a:t>
-            </a:r>
-          </a:p>
-          <a:p>
-            <a:r>
-              <a:rPr lang="en-US" dirty="0"/>
-              <a:t>That does not mean every number is equally useful for every purpose. It means the reported number depends heavily on which reasonable specification was used.</a:t>
-            </a:r>
-          </a:p>
-          <a:p>
-            <a:r>
-              <a:rPr lang="en-US" dirty="0"/>
-              <a:t>If someone publishes only one OTP number from public GTFS-RT data without disclosing the method, the reader has no way to know which version of the question that number answered.</a:t>
-            </a:r>
-          </a:p>
-          <a:p>
-            <a:r>
-              <a:rPr lang="en-US" dirty="0"/>
-              <a:t>[next slide]</a:t>
-            </a:r>
-          </a:p>
-          <a:p>
-            <a:r>
-              <a:rPr lang="en-US" dirty="0"/>
-              <a:t>5</a:t>
-            </a:r>
+            <a:endParaRPr lang="en-US" dirty="0"/>
           </a:p>
         </p:txBody>
       </p:sp>
@@ -1586,58 +1226,7 @@
           <a:bodyPr/>
           <a:lstStyle/>
           <a:p>
-            <a:r>
-              <a:rPr lang="en-US" dirty="0"/>
-              <a:t>This is the specification curve.</a:t>
-            </a:r>
-          </a:p>
-          <a:p>
-            <a:r>
-              <a:rPr lang="en-US" dirty="0"/>
-              <a:t>You do not need to read every tick mark. The point is the overall pattern.</a:t>
-            </a:r>
-          </a:p>
-          <a:p>
-            <a:r>
-              <a:rPr lang="en-US" dirty="0"/>
-              <a:t>The top panel shows the OTP estimates sorted from lowest to highest. Route 23 is in dark blue, and Route 47 is in gold. The curve starts around 20 percent and rises to almost 100 percent. The dashed lines mark the medians: 67 percent for Route 23 and 60 percent for Route 47.</a:t>
-            </a:r>
-          </a:p>
-          <a:p>
-            <a:r>
-              <a:rPr lang="en-US" dirty="0"/>
-              <a:t>The bottom panel shows which methodological choices produced those values. The color groups correspond to the main specification dimensions: snapshot rule, lateness window, early treatment, stop selection, and time of day. Delay basis is omitted here because it produces identical values in SEPTA’s data.</a:t>
-            </a:r>
-          </a:p>
-          <a:p>
-            <a:r>
-              <a:rPr lang="en-US" dirty="0"/>
-              <a:t>If you look at the snapshot-rule group at the top. The closest rule clusters toward the high-OTP side. The latest and last_before rules appear much more on the lower side. That pattern is the snapshot-rule effect made visible.</a:t>
-            </a:r>
-          </a:p>
-          <a:p>
-            <a:r>
-              <a:rPr lang="en-US" dirty="0"/>
-              <a:t>The lateness window also behaves the way we would expect: stricter windows show up more on the low-OTP side, while wider windows show up more on the high-OTP side.</a:t>
-            </a:r>
-          </a:p>
-          <a:p>
-            <a:r>
-              <a:rPr lang="en-US" dirty="0"/>
-              <a:t>The key takeaway is that the curve itself is the answer. There is no single privileged point. The reported OTP depends on which path through the specification space the analyst chose.</a:t>
-            </a:r>
-          </a:p>
-          <a:p>
-            <a:r>
-              <a:rPr lang="en-US" dirty="0"/>
-              <a:t>[next slide]</a:t>
-            </a:r>
-          </a:p>
-          <a:p>
-            <a:r>
-              <a:rPr lang="en-US" dirty="0"/>
-              <a:t>6</a:t>
-            </a:r>
+            <a:endParaRPr lang="en-US" dirty="0"/>
           </a:p>
         </p:txBody>
       </p:sp>
@@ -1721,64 +1310,7 @@
           <a:bodyPr/>
           <a:lstStyle/>
           <a:p>
-            <a:r>
-              <a:rPr lang="en-US" dirty="0"/>
-              <a:t>Slide 6 showed the pattern visually. This slide quantifies it.</a:t>
-            </a:r>
-          </a:p>
-          <a:p>
-            <a:r>
-              <a:rPr lang="en-US" dirty="0"/>
-              <a:t>For each dimension, I held all the other choices fixed and measured how much OTP changed when I varied only that one dimension. Then I averaged across all combinations.</a:t>
-            </a:r>
-          </a:p>
-          <a:p>
-            <a:r>
-              <a:rPr lang="en-US" dirty="0"/>
-              <a:t>Snapshot selection is the largest source of variation. It produces a mean OTP range of 30.7 percentage points.</a:t>
-            </a:r>
-          </a:p>
-          <a:p>
-            <a:r>
-              <a:rPr lang="en-US" dirty="0"/>
-              <a:t>That is larger than any other dimension, including the lateness window, which comes second at 27.3 percentage points.</a:t>
-            </a:r>
-          </a:p>
-          <a:p>
-            <a:r>
-              <a:rPr lang="en-US" dirty="0"/>
-              <a:t>Early treatment comes third at about 15 points. Stop selection is 9.6 points. Time of day is 7.5.</a:t>
-            </a:r>
-          </a:p>
-          <a:p>
-            <a:r>
-              <a:rPr lang="en-US" dirty="0"/>
-              <a:t>In this case study, stop selection was smaller than I expected, especially because prior work suggests stop sampling can matter for OTP. That does not mean stop selection is unimportant generally. It means that in this GTFS-RT reconstruction setting, snapshot selection moved the KPI more.</a:t>
-            </a:r>
-          </a:p>
-          <a:p>
-            <a:r>
-              <a:rPr lang="en-US" dirty="0"/>
-              <a:t>Delay basis contributes zero because SEPTA’s static GTFS feed encodes arrival and departure times identically at each stop.</a:t>
-            </a:r>
-          </a:p>
-          <a:p>
-            <a:r>
-              <a:rPr lang="en-US" dirty="0"/>
-              <a:t>Snapshot selection is the largest source of variation in this case study, and it is less visible than choices like the lateness window because it happens upstream during event reconstruction.</a:t>
-            </a:r>
-          </a:p>
-          <a:p>
-            <a:r>
-              <a:rPr lang="en-US" dirty="0"/>
-              <a:t>[next slide]</a:t>
-            </a:r>
-          </a:p>
-          <a:p>
-            <a:r>
-              <a:rPr lang="en-US" dirty="0"/>
-              <a:t>7</a:t>
-            </a:r>
+            <a:endParaRPr lang="en-US" dirty="0"/>
           </a:p>
         </p:txBody>
       </p:sp>
@@ -1862,46 +1394,7 @@
           <a:bodyPr/>
           <a:lstStyle/>
           <a:p>
-            <a:r>
-              <a:rPr lang="en-US" dirty="0"/>
-              <a:t>This slide takes a closer look at the largest sensitivity dimension: snapshot selection.</a:t>
-            </a:r>
-          </a:p>
-          <a:p>
-            <a:r>
-              <a:rPr lang="en-US" dirty="0"/>
-              <a:t>The direction of this result is not surprising. If a rule selects the prediction closest to scheduled time, it will tend to produce higher OTP, because OTP itself rewards closeness to scheduled time. I am not treating closest as the recommended reporting rule. I include it as a plausible but outcome-biased reconstruction shortcut.</a:t>
-            </a:r>
-          </a:p>
-          <a:p>
-            <a:r>
-              <a:rPr lang="en-US" dirty="0"/>
-              <a:t>The important point is the size of the effect. Holding everything else fixed — minus-one to plus-five lateness window, count early as late, all stops, all day, arrival-based delay — changing only the snapshot rule moves Route 23 from 87.4 percent with closest to 56.0 percent with latest. Route 47 moves from 86.2 percent to 48.8 percent.</a:t>
-            </a:r>
-          </a:p>
-          <a:p>
-            <a:r>
-              <a:rPr lang="en-US" dirty="0"/>
-              <a:t>Same data. Same lateness window. Same stops. Same time period. The only thing that changed is which GTFS-RT prediction represents the stop event.</a:t>
-            </a:r>
-          </a:p>
-          <a:p>
-            <a:r>
-              <a:rPr lang="en-US" dirty="0"/>
-              <a:t>The takeaway is that the reconstruction step can change the final KPI before the OTP window is even applied.</a:t>
-            </a:r>
-          </a:p>
-          <a:p>
-            <a:r>
-              <a:rPr lang="en-US" dirty="0"/>
-              <a:t>[next slide]</a:t>
-            </a:r>
-          </a:p>
-          <a:p>
-            <a:r>
-              <a:rPr lang="en-US" dirty="0"/>
-              <a:t>8</a:t>
-            </a:r>
+            <a:endParaRPr lang="en-US" dirty="0"/>
           </a:p>
         </p:txBody>
       </p:sp>
@@ -1985,46 +1478,7 @@
           <a:bodyPr/>
           <a:lstStyle/>
           <a:p>
-            <a:r>
-              <a:rPr lang="en-US" dirty="0"/>
-              <a:t>One objection is: are the extreme specifications just bugs or edge cases?</a:t>
-            </a:r>
-          </a:p>
-          <a:p>
-            <a:r>
-              <a:rPr lang="en-US" dirty="0"/>
-              <a:t>I do not think so. They are produced by combinations of individually reasonable choices.</a:t>
-            </a:r>
-          </a:p>
-          <a:p>
-            <a:r>
-              <a:rPr lang="en-US" dirty="0"/>
-              <a:t>The high-end specifications share a pattern: closest snapshot rule, ignore early arrivals, wider lateness window, and AM peak. Each of those can be defended in isolation. But together, they select strongly for stop events that look on time, producing values near 99 percent.</a:t>
-            </a:r>
-          </a:p>
-          <a:p>
-            <a:r>
-              <a:rPr lang="en-US" dirty="0"/>
-              <a:t>The low-end specifications have a different pattern: last_before or latest, count early arrivals as failures, strict 0-to-3-minute window, and terminals only. That combines stricter reconstruction with a stricter OTP definition, so it produces values near 20 percent.</a:t>
-            </a:r>
-          </a:p>
-          <a:p>
-            <a:r>
-              <a:rPr lang="en-US" dirty="0"/>
-              <a:t>Neither endpoint should be treated as “the” correct value. The point is that without disclosure, the reader cannot tell which question the reported OTP number actually answered.</a:t>
-            </a:r>
-          </a:p>
-          <a:p>
-            <a:r>
-              <a:rPr lang="en-US" dirty="0"/>
-              <a:t>[next slide]</a:t>
-            </a:r>
-          </a:p>
-          <a:p>
-            <a:r>
-              <a:rPr lang="en-US" dirty="0"/>
-              <a:t>9</a:t>
-            </a:r>
+            <a:endParaRPr lang="en-US" dirty="0"/>
           </a:p>
         </p:txBody>
       </p:sp>
@@ -2879,7 +2333,7 @@
         </p:nvSpPr>
         <p:spPr>
           <a:xfrm>
-            <a:off x="731520" y="914400"/>
+            <a:off x="713232" y="1211907"/>
             <a:ext cx="10698480" cy="548640"/>
           </a:xfrm>
           <a:prstGeom prst="rect">
@@ -2918,7 +2372,7 @@
         </p:nvSpPr>
         <p:spPr>
           <a:xfrm>
-            <a:off x="731520" y="1508760"/>
+            <a:off x="713232" y="1806267"/>
             <a:ext cx="10698480" cy="365760"/>
           </a:xfrm>
           <a:prstGeom prst="rect">
@@ -2957,7 +2411,7 @@
         </p:nvSpPr>
         <p:spPr>
           <a:xfrm>
-            <a:off x="1143000" y="2103120"/>
+            <a:off x="1143000" y="2825496"/>
             <a:ext cx="4754880" cy="384048"/>
           </a:xfrm>
           <a:prstGeom prst="rect">
@@ -3007,7 +2461,7 @@
         </p:nvSpPr>
         <p:spPr>
           <a:xfrm>
-            <a:off x="731520" y="2532888"/>
+            <a:off x="731520" y="3255264"/>
             <a:ext cx="292608" cy="292608"/>
           </a:xfrm>
           <a:prstGeom prst="rect">
@@ -3039,7 +2493,7 @@
         </p:nvSpPr>
         <p:spPr>
           <a:xfrm>
-            <a:off x="713232" y="2532888"/>
+            <a:off x="713232" y="3255264"/>
             <a:ext cx="292608" cy="292608"/>
           </a:xfrm>
           <a:prstGeom prst="rect">
@@ -3078,7 +2532,7 @@
         </p:nvSpPr>
         <p:spPr>
           <a:xfrm>
-            <a:off x="1143000" y="2487168"/>
+            <a:off x="1143000" y="3209544"/>
             <a:ext cx="4754880" cy="384048"/>
           </a:xfrm>
           <a:prstGeom prst="rect">
@@ -3128,7 +2582,7 @@
         </p:nvSpPr>
         <p:spPr>
           <a:xfrm>
-            <a:off x="731520" y="2916936"/>
+            <a:off x="731520" y="3639312"/>
             <a:ext cx="292608" cy="292608"/>
           </a:xfrm>
           <a:prstGeom prst="rect">
@@ -3160,7 +2614,7 @@
         </p:nvSpPr>
         <p:spPr>
           <a:xfrm>
-            <a:off x="731520" y="2916936"/>
+            <a:off x="731520" y="3639312"/>
             <a:ext cx="292608" cy="292608"/>
           </a:xfrm>
           <a:prstGeom prst="rect">
@@ -3199,7 +2653,7 @@
         </p:nvSpPr>
         <p:spPr>
           <a:xfrm>
-            <a:off x="1143000" y="2871216"/>
+            <a:off x="1143000" y="3593592"/>
             <a:ext cx="4754880" cy="384048"/>
           </a:xfrm>
           <a:prstGeom prst="rect">
@@ -3249,7 +2703,7 @@
         </p:nvSpPr>
         <p:spPr>
           <a:xfrm>
-            <a:off x="731520" y="3300984"/>
+            <a:off x="731520" y="4023360"/>
             <a:ext cx="292608" cy="292608"/>
           </a:xfrm>
           <a:prstGeom prst="rect">
@@ -3281,7 +2735,7 @@
         </p:nvSpPr>
         <p:spPr>
           <a:xfrm>
-            <a:off x="731520" y="3300984"/>
+            <a:off x="731520" y="4023360"/>
             <a:ext cx="292608" cy="292608"/>
           </a:xfrm>
           <a:prstGeom prst="rect">
@@ -3320,7 +2774,7 @@
         </p:nvSpPr>
         <p:spPr>
           <a:xfrm>
-            <a:off x="1143000" y="3255264"/>
+            <a:off x="1143000" y="3977640"/>
             <a:ext cx="4754880" cy="384048"/>
           </a:xfrm>
           <a:prstGeom prst="rect">
@@ -3370,7 +2824,7 @@
         </p:nvSpPr>
         <p:spPr>
           <a:xfrm>
-            <a:off x="731520" y="3685032"/>
+            <a:off x="731520" y="4407408"/>
             <a:ext cx="292608" cy="292608"/>
           </a:xfrm>
           <a:prstGeom prst="rect">
@@ -3402,7 +2856,7 @@
         </p:nvSpPr>
         <p:spPr>
           <a:xfrm>
-            <a:off x="731520" y="3685032"/>
+            <a:off x="731520" y="4407408"/>
             <a:ext cx="292608" cy="292608"/>
           </a:xfrm>
           <a:prstGeom prst="rect">
@@ -3441,7 +2895,7 @@
         </p:nvSpPr>
         <p:spPr>
           <a:xfrm>
-            <a:off x="1143000" y="3639312"/>
+            <a:off x="1143000" y="4361688"/>
             <a:ext cx="4754880" cy="384048"/>
           </a:xfrm>
           <a:prstGeom prst="rect">
@@ -3491,7 +2945,7 @@
         </p:nvSpPr>
         <p:spPr>
           <a:xfrm>
-            <a:off x="731520" y="4069080"/>
+            <a:off x="731520" y="4791456"/>
             <a:ext cx="292608" cy="292608"/>
           </a:xfrm>
           <a:prstGeom prst="rect">
@@ -3523,7 +2977,7 @@
         </p:nvSpPr>
         <p:spPr>
           <a:xfrm>
-            <a:off x="731520" y="4069080"/>
+            <a:off x="731520" y="4791456"/>
             <a:ext cx="292608" cy="292608"/>
           </a:xfrm>
           <a:prstGeom prst="rect">
@@ -3562,7 +3016,7 @@
         </p:nvSpPr>
         <p:spPr>
           <a:xfrm>
-            <a:off x="1143000" y="4023360"/>
+            <a:off x="1143000" y="4745736"/>
             <a:ext cx="4754880" cy="384048"/>
           </a:xfrm>
           <a:prstGeom prst="rect">
@@ -3612,7 +3066,7 @@
         </p:nvSpPr>
         <p:spPr>
           <a:xfrm>
-            <a:off x="6217920" y="2148840"/>
+            <a:off x="6217920" y="2871216"/>
             <a:ext cx="292608" cy="292608"/>
           </a:xfrm>
           <a:prstGeom prst="rect">
@@ -3644,7 +3098,7 @@
         </p:nvSpPr>
         <p:spPr>
           <a:xfrm>
-            <a:off x="6217920" y="2148840"/>
+            <a:off x="6217920" y="2871216"/>
             <a:ext cx="292608" cy="292608"/>
           </a:xfrm>
           <a:prstGeom prst="rect">
@@ -3683,7 +3137,7 @@
         </p:nvSpPr>
         <p:spPr>
           <a:xfrm>
-            <a:off x="6629400" y="2103120"/>
+            <a:off x="6629400" y="2825496"/>
             <a:ext cx="4754880" cy="384048"/>
           </a:xfrm>
           <a:prstGeom prst="rect">
@@ -3733,7 +3187,7 @@
         </p:nvSpPr>
         <p:spPr>
           <a:xfrm>
-            <a:off x="6217920" y="2532888"/>
+            <a:off x="6217920" y="3255264"/>
             <a:ext cx="292608" cy="292608"/>
           </a:xfrm>
           <a:prstGeom prst="rect">
@@ -3765,7 +3219,7 @@
         </p:nvSpPr>
         <p:spPr>
           <a:xfrm>
-            <a:off x="6217920" y="2532888"/>
+            <a:off x="6217920" y="3255264"/>
             <a:ext cx="292608" cy="292608"/>
           </a:xfrm>
           <a:prstGeom prst="rect">
@@ -3804,7 +3258,7 @@
         </p:nvSpPr>
         <p:spPr>
           <a:xfrm>
-            <a:off x="6629400" y="2487168"/>
+            <a:off x="6629400" y="3209544"/>
             <a:ext cx="4754880" cy="384048"/>
           </a:xfrm>
           <a:prstGeom prst="rect">
@@ -3854,7 +3308,7 @@
         </p:nvSpPr>
         <p:spPr>
           <a:xfrm>
-            <a:off x="6217920" y="2916936"/>
+            <a:off x="6217920" y="3639312"/>
             <a:ext cx="292608" cy="292608"/>
           </a:xfrm>
           <a:prstGeom prst="rect">
@@ -3886,7 +3340,7 @@
         </p:nvSpPr>
         <p:spPr>
           <a:xfrm>
-            <a:off x="6217920" y="2916936"/>
+            <a:off x="6217920" y="3639312"/>
             <a:ext cx="292608" cy="292608"/>
           </a:xfrm>
           <a:prstGeom prst="rect">
@@ -3925,7 +3379,7 @@
         </p:nvSpPr>
         <p:spPr>
           <a:xfrm>
-            <a:off x="6629400" y="2871216"/>
+            <a:off x="6629400" y="3593592"/>
             <a:ext cx="4754880" cy="384048"/>
           </a:xfrm>
           <a:prstGeom prst="rect">
@@ -3975,7 +3429,7 @@
         </p:nvSpPr>
         <p:spPr>
           <a:xfrm>
-            <a:off x="6217920" y="3300984"/>
+            <a:off x="6217920" y="4023360"/>
             <a:ext cx="292608" cy="292608"/>
           </a:xfrm>
           <a:prstGeom prst="rect">
@@ -4007,7 +3461,7 @@
         </p:nvSpPr>
         <p:spPr>
           <a:xfrm>
-            <a:off x="6217920" y="3300984"/>
+            <a:off x="6217920" y="4023360"/>
             <a:ext cx="292608" cy="292608"/>
           </a:xfrm>
           <a:prstGeom prst="rect">
@@ -4046,7 +3500,7 @@
         </p:nvSpPr>
         <p:spPr>
           <a:xfrm>
-            <a:off x="6629400" y="3255264"/>
+            <a:off x="6629400" y="3977640"/>
             <a:ext cx="4754880" cy="384048"/>
           </a:xfrm>
           <a:prstGeom prst="rect">
@@ -4096,7 +3550,7 @@
         </p:nvSpPr>
         <p:spPr>
           <a:xfrm>
-            <a:off x="6217920" y="3685032"/>
+            <a:off x="6217920" y="4407408"/>
             <a:ext cx="292608" cy="292608"/>
           </a:xfrm>
           <a:prstGeom prst="rect">
@@ -4128,7 +3582,7 @@
         </p:nvSpPr>
         <p:spPr>
           <a:xfrm>
-            <a:off x="6217920" y="3685032"/>
+            <a:off x="6217920" y="4407408"/>
             <a:ext cx="292608" cy="292608"/>
           </a:xfrm>
           <a:prstGeom prst="rect">
@@ -4167,7 +3621,7 @@
         </p:nvSpPr>
         <p:spPr>
           <a:xfrm>
-            <a:off x="6629400" y="3639312"/>
+            <a:off x="6629400" y="4361688"/>
             <a:ext cx="4754880" cy="384048"/>
           </a:xfrm>
           <a:prstGeom prst="rect">
@@ -4223,7 +3677,7 @@
         </p:nvSpPr>
         <p:spPr>
           <a:xfrm>
-            <a:off x="729857" y="2148840"/>
+            <a:off x="729857" y="2871216"/>
             <a:ext cx="292608" cy="292608"/>
           </a:xfrm>
           <a:prstGeom prst="rect">
@@ -4255,7 +3709,7 @@
         </p:nvSpPr>
         <p:spPr>
           <a:xfrm>
-            <a:off x="731520" y="2148840"/>
+            <a:off x="731520" y="2871216"/>
             <a:ext cx="292608" cy="292608"/>
           </a:xfrm>
           <a:prstGeom prst="rect">
@@ -6594,7 +6048,7 @@
         </p:nvSpPr>
         <p:spPr>
           <a:xfrm>
-            <a:off x="8412480" y="3739897"/>
+            <a:off x="8412480" y="3658254"/>
             <a:ext cx="2743200" cy="822960"/>
           </a:xfrm>
           <a:prstGeom prst="rect">
@@ -11176,77 +10630,6 @@
           <a:chExt cx="0" cy="0"/>
         </a:xfrm>
       </p:grpSpPr>
-      <p:sp>
-        <p:nvSpPr>
-          <p:cNvPr id="2" name="Shape 0"/>
-          <p:cNvSpPr/>
-          <p:nvPr/>
-        </p:nvSpPr>
-        <p:spPr>
-          <a:xfrm>
-            <a:off x="0" y="0"/>
-            <a:ext cx="12161520" cy="640080"/>
-          </a:xfrm>
-          <a:prstGeom prst="rect">
-            <a:avLst/>
-          </a:prstGeom>
-          <a:solidFill>
-            <a:srgbClr val="1A2438"/>
-          </a:solidFill>
-          <a:ln w="12700">
-            <a:solidFill>
-              <a:srgbClr val="1A2438"/>
-            </a:solidFill>
-            <a:prstDash val="solid"/>
-          </a:ln>
-        </p:spPr>
-        <p:txBody>
-          <a:bodyPr/>
-          <a:lstStyle/>
-          <a:p>
-            <a:endParaRPr lang="en-US"/>
-          </a:p>
-        </p:txBody>
-      </p:sp>
-      <p:sp>
-        <p:nvSpPr>
-          <p:cNvPr id="3" name="Text 1"/>
-          <p:cNvSpPr/>
-          <p:nvPr/>
-        </p:nvSpPr>
-        <p:spPr>
-          <a:xfrm>
-            <a:off x="548640" y="0"/>
-            <a:ext cx="10972800" cy="640080"/>
-          </a:xfrm>
-          <a:prstGeom prst="rect">
-            <a:avLst/>
-          </a:prstGeom>
-          <a:noFill/>
-          <a:ln/>
-        </p:spPr>
-        <p:txBody>
-          <a:bodyPr wrap="square" lIns="0" tIns="0" rIns="0" bIns="0" rtlCol="0" anchor="ctr"/>
-          <a:lstStyle/>
-          <a:p>
-            <a:pPr marL="0" indent="0">
-              <a:buNone/>
-            </a:pPr>
-            <a:r>
-              <a:rPr lang="en-US" sz="1100" b="1" kern="0" spc="800" dirty="0">
-                <a:solidFill>
-                  <a:srgbClr val="E8B547"/>
-                </a:solidFill>
-                <a:latin typeface="Calibri" pitchFamily="34" charset="0"/>
-                <a:ea typeface="Calibri" pitchFamily="34" charset="-122"/>
-                <a:cs typeface="Calibri" pitchFamily="34" charset="-120"/>
-              </a:rPr>
-              <a:t>RESULT 1: THE SPREAD (VISUALIZED)</a:t>
-            </a:r>
-            <a:endParaRPr lang="en-US" sz="1100" dirty="0"/>
-          </a:p>
-        </p:txBody>
-      </p:sp>
       <p:pic>
         <p:nvPicPr>
           <p:cNvPr id="10" name="Picture 9">
@@ -11269,7 +10652,7 @@
         </p:blipFill>
         <p:spPr>
           <a:xfrm>
-            <a:off x="1737360" y="640081"/>
+            <a:off x="1767840" y="640080"/>
             <a:ext cx="10424160" cy="6217920"/>
           </a:xfrm>
           <a:prstGeom prst="rect">
@@ -11279,92 +10662,14 @@
       </p:pic>
       <p:sp>
         <p:nvSpPr>
-          <p:cNvPr id="4" name="Text 2"/>
-          <p:cNvSpPr/>
-          <p:nvPr/>
-        </p:nvSpPr>
-        <p:spPr>
-          <a:xfrm>
-            <a:off x="415636" y="889462"/>
-            <a:ext cx="2826327" cy="548640"/>
-          </a:xfrm>
-          <a:prstGeom prst="rect">
-            <a:avLst/>
-          </a:prstGeom>
-          <a:noFill/>
-          <a:ln/>
-        </p:spPr>
-        <p:txBody>
-          <a:bodyPr wrap="square" lIns="0" tIns="0" rIns="0" bIns="0" rtlCol="0" anchor="ctr"/>
-          <a:lstStyle/>
-          <a:p>
-            <a:pPr marL="0" indent="0">
-              <a:buNone/>
-            </a:pPr>
-            <a:r>
-              <a:rPr lang="en-US" sz="2600" b="1" dirty="0">
-                <a:solidFill>
-                  <a:srgbClr val="1A2438"/>
-                </a:solidFill>
-                <a:latin typeface="Cambria" pitchFamily="34" charset="0"/>
-                <a:ea typeface="Cambria" pitchFamily="34" charset="-122"/>
-                <a:cs typeface="Cambria" pitchFamily="34" charset="-120"/>
-              </a:rPr>
-              <a:t>The specification curve</a:t>
-            </a:r>
-            <a:endParaRPr lang="en-US" sz="2600" dirty="0"/>
-          </a:p>
-        </p:txBody>
-      </p:sp>
-      <p:sp>
-        <p:nvSpPr>
-          <p:cNvPr id="5" name="Text 3"/>
-          <p:cNvSpPr/>
-          <p:nvPr/>
-        </p:nvSpPr>
-        <p:spPr>
-          <a:xfrm>
-            <a:off x="415636" y="1684427"/>
-            <a:ext cx="2826327" cy="365760"/>
-          </a:xfrm>
-          <a:prstGeom prst="rect">
-            <a:avLst/>
-          </a:prstGeom>
-          <a:noFill/>
-          <a:ln/>
-        </p:spPr>
-        <p:txBody>
-          <a:bodyPr wrap="square" lIns="0" tIns="0" rIns="0" bIns="0" rtlCol="0" anchor="ctr"/>
-          <a:lstStyle/>
-          <a:p>
-            <a:pPr marL="0" indent="0">
-              <a:buNone/>
-            </a:pPr>
-            <a:r>
-              <a:rPr lang="en-US" sz="1300" dirty="0">
-                <a:solidFill>
-                  <a:srgbClr val="6B7280"/>
-                </a:solidFill>
-                <a:latin typeface="Calibri" pitchFamily="34" charset="0"/>
-                <a:ea typeface="Calibri" pitchFamily="34" charset="-122"/>
-                <a:cs typeface="Calibri" pitchFamily="34" charset="-120"/>
-              </a:rPr>
-              <a:t>Each point is one high-sample OTP estimate, sorted from lowest to highest.</a:t>
-            </a:r>
-            <a:endParaRPr lang="en-US" sz="1300" dirty="0"/>
-          </a:p>
-        </p:txBody>
-      </p:sp>
-      <p:sp>
-        <p:nvSpPr>
-          <p:cNvPr id="7" name="Shape 4"/>
-          <p:cNvSpPr/>
-          <p:nvPr/>
-        </p:nvSpPr>
-        <p:spPr>
-          <a:xfrm>
-            <a:off x="0" y="6410897"/>
-            <a:ext cx="5601229" cy="440575"/>
+          <p:cNvPr id="2" name="Shape 0"/>
+          <p:cNvSpPr/>
+          <p:nvPr/>
+        </p:nvSpPr>
+        <p:spPr>
+          <a:xfrm>
+            <a:off x="0" y="-12323"/>
+            <a:ext cx="12161520" cy="640080"/>
           </a:xfrm>
           <a:prstGeom prst="rect">
             <a:avLst/>
@@ -11389,14 +10694,14 @@
       </p:sp>
       <p:sp>
         <p:nvSpPr>
-          <p:cNvPr id="8" name="Text 5"/>
-          <p:cNvSpPr/>
-          <p:nvPr/>
-        </p:nvSpPr>
-        <p:spPr>
-          <a:xfrm>
-            <a:off x="261851" y="6386251"/>
-            <a:ext cx="5266113" cy="502920"/>
+          <p:cNvPr id="3" name="Text 1"/>
+          <p:cNvSpPr/>
+          <p:nvPr/>
+        </p:nvSpPr>
+        <p:spPr>
+          <a:xfrm>
+            <a:off x="548640" y="0"/>
+            <a:ext cx="10972800" cy="640080"/>
           </a:xfrm>
           <a:prstGeom prst="rect">
             <a:avLst/>
@@ -11412,7 +10717,7 @@
               <a:buNone/>
             </a:pPr>
             <a:r>
-              <a:rPr lang="en-US" sz="1100" b="1" kern="0" spc="400" dirty="0">
+              <a:rPr lang="en-US" sz="1100" b="1" kern="0" spc="800" dirty="0">
                 <a:solidFill>
                   <a:srgbClr val="E8B547"/>
                 </a:solidFill>
@@ -11420,18 +10725,167 @@
                 <a:ea typeface="Calibri" pitchFamily="34" charset="-122"/>
                 <a:cs typeface="Calibri" pitchFamily="34" charset="-120"/>
               </a:rPr>
-              <a:t>TAKEAWAY  </a:t>
-            </a:r>
+              <a:t>RESULT 1: THE SPREAD (VISUALIZED)</a:t>
+            </a:r>
+            <a:endParaRPr lang="en-US" sz="1100" dirty="0"/>
+          </a:p>
+        </p:txBody>
+      </p:sp>
+      <p:sp>
+        <p:nvSpPr>
+          <p:cNvPr id="4" name="Text 2"/>
+          <p:cNvSpPr/>
+          <p:nvPr/>
+        </p:nvSpPr>
+        <p:spPr>
+          <a:xfrm>
+            <a:off x="415636" y="889462"/>
+            <a:ext cx="2826327" cy="548640"/>
+          </a:xfrm>
+          <a:prstGeom prst="rect">
+            <a:avLst/>
+          </a:prstGeom>
+          <a:noFill/>
+          <a:ln/>
+        </p:spPr>
+        <p:txBody>
+          <a:bodyPr wrap="square" lIns="0" tIns="0" rIns="0" bIns="0" rtlCol="0" anchor="ctr"/>
+          <a:lstStyle/>
+          <a:p>
+            <a:pPr marL="0" indent="0">
+              <a:buNone/>
+            </a:pPr>
+            <a:r>
+              <a:rPr lang="en-US" sz="2600" b="1" dirty="0">
+                <a:solidFill>
+                  <a:srgbClr val="1A2438"/>
+                </a:solidFill>
+                <a:latin typeface="Cambria" pitchFamily="34" charset="0"/>
+                <a:ea typeface="Cambria" pitchFamily="34" charset="-122"/>
+                <a:cs typeface="Cambria" pitchFamily="34" charset="-120"/>
+              </a:rPr>
+              <a:t>The specification curve</a:t>
+            </a:r>
+            <a:endParaRPr lang="en-US" sz="2600" dirty="0"/>
+          </a:p>
+        </p:txBody>
+      </p:sp>
+      <p:sp>
+        <p:nvSpPr>
+          <p:cNvPr id="5" name="Text 3"/>
+          <p:cNvSpPr/>
+          <p:nvPr/>
+        </p:nvSpPr>
+        <p:spPr>
+          <a:xfrm>
+            <a:off x="415636" y="1684427"/>
+            <a:ext cx="2826327" cy="365760"/>
+          </a:xfrm>
+          <a:prstGeom prst="rect">
+            <a:avLst/>
+          </a:prstGeom>
+          <a:noFill/>
+          <a:ln/>
+        </p:spPr>
+        <p:txBody>
+          <a:bodyPr wrap="square" lIns="0" tIns="0" rIns="0" bIns="0" rtlCol="0" anchor="ctr"/>
+          <a:lstStyle/>
+          <a:p>
+            <a:pPr marL="0" indent="0">
+              <a:buNone/>
+            </a:pPr>
             <a:r>
               <a:rPr lang="en-US" sz="1300" dirty="0">
                 <a:solidFill>
-                  <a:srgbClr val="FFFFFF"/>
+                  <a:srgbClr val="6B7280"/>
                 </a:solidFill>
                 <a:latin typeface="Calibri" pitchFamily="34" charset="0"/>
                 <a:ea typeface="Calibri" pitchFamily="34" charset="-122"/>
                 <a:cs typeface="Calibri" pitchFamily="34" charset="-120"/>
               </a:rPr>
-              <a:t>The 'curve' is the answer.  No single point is privileged.</a:t>
+              <a:t>Each point is one high-sample OTP estimate, sorted from lowest to highest.</a:t>
+            </a:r>
+            <a:endParaRPr lang="en-US" sz="1300" dirty="0"/>
+          </a:p>
+        </p:txBody>
+      </p:sp>
+      <p:sp>
+        <p:nvSpPr>
+          <p:cNvPr id="7" name="Shape 4"/>
+          <p:cNvSpPr/>
+          <p:nvPr/>
+        </p:nvSpPr>
+        <p:spPr>
+          <a:xfrm>
+            <a:off x="0" y="6410897"/>
+            <a:ext cx="5601229" cy="440575"/>
+          </a:xfrm>
+          <a:prstGeom prst="rect">
+            <a:avLst/>
+          </a:prstGeom>
+          <a:solidFill>
+            <a:srgbClr val="1A2438"/>
+          </a:solidFill>
+          <a:ln w="12700">
+            <a:solidFill>
+              <a:srgbClr val="1A2438"/>
+            </a:solidFill>
+            <a:prstDash val="solid"/>
+          </a:ln>
+        </p:spPr>
+        <p:txBody>
+          <a:bodyPr/>
+          <a:lstStyle/>
+          <a:p>
+            <a:endParaRPr lang="en-US"/>
+          </a:p>
+        </p:txBody>
+      </p:sp>
+      <p:sp>
+        <p:nvSpPr>
+          <p:cNvPr id="8" name="Text 5"/>
+          <p:cNvSpPr/>
+          <p:nvPr/>
+        </p:nvSpPr>
+        <p:spPr>
+          <a:xfrm>
+            <a:off x="261851" y="6386251"/>
+            <a:ext cx="5266113" cy="502920"/>
+          </a:xfrm>
+          <a:prstGeom prst="rect">
+            <a:avLst/>
+          </a:prstGeom>
+          <a:noFill/>
+          <a:ln/>
+        </p:spPr>
+        <p:txBody>
+          <a:bodyPr wrap="square" lIns="0" tIns="0" rIns="0" bIns="0" rtlCol="0" anchor="ctr"/>
+          <a:lstStyle/>
+          <a:p>
+            <a:pPr marL="0" indent="0">
+              <a:buNone/>
+            </a:pPr>
+            <a:r>
+              <a:rPr lang="en-US" sz="1100" b="1" kern="0" spc="400" dirty="0">
+                <a:solidFill>
+                  <a:srgbClr val="E8B547"/>
+                </a:solidFill>
+                <a:latin typeface="Calibri" pitchFamily="34" charset="0"/>
+                <a:ea typeface="Calibri" pitchFamily="34" charset="-122"/>
+                <a:cs typeface="Calibri" pitchFamily="34" charset="-120"/>
+              </a:rPr>
+              <a:t>TAKEAWAY  </a:t>
+            </a:r>
+            <a:r>
+              <a:rPr lang="en-US" sz="1300" dirty="0">
+                <a:solidFill>
+                  <a:srgbClr val="FFFFFF"/>
+                </a:solidFill>
+                <a:latin typeface="Calibri" pitchFamily="34" charset="0"/>
+                <a:ea typeface="Calibri" pitchFamily="34" charset="-122"/>
+                <a:cs typeface="Calibri" pitchFamily="34" charset="-120"/>
+              </a:rPr>
+              <a:t>The curve is the answer.  No single point is “correct”.</a:t>
             </a:r>
             <a:endParaRPr lang="en-US" sz="1100" dirty="0"/>
           </a:p>
@@ -11809,7 +11263,7 @@
                 <a:ea typeface="Calibri" pitchFamily="34" charset="-122"/>
                 <a:cs typeface="Calibri" pitchFamily="34" charset="-120"/>
               </a:rPr>
-              <a:t>Largest dimension — even above the well-studied lateness window.</a:t>
+              <a:t>Largest dimension, even above the well-studied lateness window.</a:t>
             </a:r>
             <a:endParaRPr lang="en-US" sz="1300" dirty="0"/>
           </a:p>
@@ -13351,7 +12805,7 @@
                 <a:ea typeface="Calibri" pitchFamily="34" charset="-122"/>
                 <a:cs typeface="Calibri" pitchFamily="34" charset="-120"/>
               </a:rPr>
-              <a:t>The selection rule and the metric measure overlapping properties — the rule biases toward predictions that already look on time.</a:t>
+              <a:t>The selection rule and the metric measure overlapping properties since the rule biases toward predictions that already look on time.</a:t>
             </a:r>
             <a:endParaRPr lang="en-US" sz="1300" dirty="0"/>
           </a:p>
@@ -13533,7 +12987,7 @@
                 <a:ea typeface="Calibri" pitchFamily="34" charset="-122"/>
                 <a:cs typeface="Calibri" pitchFamily="34" charset="-120"/>
               </a:rPr>
-              <a:t>Neither endpoint is the single 'correct' value — each answers a different question.</a:t>
+              <a:t>Neither endpoint is the single 'correct' value since each answers a different question.</a:t>
             </a:r>
             <a:endParaRPr lang="en-US" sz="1300" dirty="0"/>
           </a:p>
